--- a/examples/tech.pptx
+++ b/examples/tech.pptx
@@ -14,6 +14,7 @@
     <p:sldId id="262" r:id="rId13"/>
     <p:sldId id="263" r:id="rId14"/>
     <p:sldId id="264" r:id="rId15"/>
+    <p:sldId id="265" r:id="rId16"/>
   </p:sldIdLst>
   <p:sldSz cx="12192000" cy="6858000" type="screen4x3"/>
   <p:notesSz cx="6858000" cy="9144000"/>
@@ -3805,7 +3806,7 @@
         <p:spPr>
           <a:xfrm>
             <a:off x="9026425" y="4788991"/>
-            <a:ext cx="866775" cy="276225"/>
+            <a:ext cx="619125" cy="276225"/>
           </a:xfrm>
           <a:prstGeom prst="roundRect">
             <a:avLst>
@@ -3850,8 +3851,8 @@
         </p:nvSpPr>
         <p:spPr>
           <a:xfrm>
-            <a:off x="9969400" y="4788991"/>
-            <a:ext cx="619125" cy="276225"/>
+            <a:off x="9721750" y="4788991"/>
+            <a:ext cx="866775" cy="276225"/>
           </a:xfrm>
           <a:prstGeom prst="roundRect">
             <a:avLst>
@@ -3897,7 +3898,7 @@
         <p:spPr>
           <a:xfrm>
             <a:off x="8207275" y="5141416"/>
-            <a:ext cx="742950" cy="276225"/>
+            <a:ext cx="619125" cy="276225"/>
           </a:xfrm>
           <a:prstGeom prst="roundRect">
             <a:avLst>
@@ -3942,8 +3943,8 @@
         </p:nvSpPr>
         <p:spPr>
           <a:xfrm>
-            <a:off x="9026425" y="5141416"/>
-            <a:ext cx="495300" cy="276225"/>
+            <a:off x="8902600" y="5141416"/>
+            <a:ext cx="742950" cy="276225"/>
           </a:xfrm>
           <a:prstGeom prst="roundRect">
             <a:avLst>
@@ -3980,9 +3981,55 @@
           <a:p/>
         </p:txBody>
       </p:sp>
+      <p:sp>
+        <p:nvSpPr>
+          <p:cNvPr id="21" name="Rounded Rectangle 20"/>
+          <p:cNvSpPr/>
+          <p:nvPr/>
+        </p:nvSpPr>
+        <p:spPr>
+          <a:xfrm>
+            <a:off x="9721750" y="5141416"/>
+            <a:ext cx="495300" cy="276225"/>
+          </a:xfrm>
+          <a:prstGeom prst="roundRect">
+            <a:avLst>
+              <a:gd name="adj" fmla="val 50000"/>
+            </a:avLst>
+          </a:prstGeom>
+          <a:noFill/>
+          <a:ln w="9525">
+            <a:solidFill>
+              <a:srgbClr val="7DD3FC">
+                <a:alpha val="35000"/>
+              </a:srgbClr>
+            </a:solidFill>
+          </a:ln>
+          <a:effectLst/>
+        </p:spPr>
+        <p:style>
+          <a:lnRef idx="1">
+            <a:schemeClr val="accent1"/>
+          </a:lnRef>
+          <a:fillRef idx="3">
+            <a:schemeClr val="accent1"/>
+          </a:fillRef>
+          <a:effectRef idx="2">
+            <a:schemeClr val="accent1"/>
+          </a:effectRef>
+          <a:fontRef idx="minor">
+            <a:schemeClr val="lt1"/>
+          </a:fontRef>
+        </p:style>
+        <p:txBody>
+          <a:bodyPr rtlCol="0" anchor="ctr"/>
+          <a:lstStyle/>
+          <a:p/>
+        </p:txBody>
+      </p:sp>
       <p:pic>
         <p:nvPicPr>
-          <p:cNvPr id="21" name="Picture 20" descr="icon-zap-d4d6f93747.png"/>
+          <p:cNvPr id="22" name="Picture 21" descr="icon-zap-d4d6f93747.png"/>
           <p:cNvPicPr>
             <a:picLocks noChangeAspect="1"/>
           </p:cNvPicPr>
@@ -4006,7 +4053,7 @@
       </p:pic>
       <p:pic>
         <p:nvPicPr>
-          <p:cNvPr id="22" name="Picture 21" descr="icon-target-002307b16f.png"/>
+          <p:cNvPr id="23" name="Picture 22" descr="icon-target-002307b16f.png"/>
           <p:cNvPicPr>
             <a:picLocks noChangeAspect="1"/>
           </p:cNvPicPr>
@@ -4030,7 +4077,7 @@
       </p:pic>
       <p:pic>
         <p:nvPicPr>
-          <p:cNvPr id="23" name="Picture 22" descr="icon-sparkles-969ece8023.png"/>
+          <p:cNvPr id="24" name="Picture 23" descr="icon-sparkles-969ece8023.png"/>
           <p:cNvPicPr>
             <a:picLocks noChangeAspect="1"/>
           </p:cNvPicPr>
@@ -4054,7 +4101,7 @@
       </p:pic>
       <p:pic>
         <p:nvPicPr>
-          <p:cNvPr id="24" name="Picture 23" descr="icon-compass-4b0dcd1cb1.png"/>
+          <p:cNvPr id="25" name="Picture 24" descr="icon-compass-4b0dcd1cb1.png"/>
           <p:cNvPicPr>
             <a:picLocks noChangeAspect="1"/>
           </p:cNvPicPr>
@@ -4078,7 +4125,7 @@
       </p:pic>
       <p:sp>
         <p:nvSpPr>
-          <p:cNvPr id="25" name="TextBox 24"/>
+          <p:cNvPr id="26" name="TextBox 25"/>
           <p:cNvSpPr txBox="1"/>
           <p:nvPr/>
         </p:nvSpPr>
@@ -4118,7 +4165,7 @@
       </p:sp>
       <p:sp>
         <p:nvSpPr>
-          <p:cNvPr id="26" name="TextBox 25"/>
+          <p:cNvPr id="27" name="TextBox 26"/>
           <p:cNvSpPr txBox="1"/>
           <p:nvPr/>
         </p:nvSpPr>
@@ -4158,7 +4205,7 @@
       </p:sp>
       <p:sp>
         <p:nvSpPr>
-          <p:cNvPr id="27" name="TextBox 26"/>
+          <p:cNvPr id="28" name="TextBox 27"/>
           <p:cNvSpPr txBox="1"/>
           <p:nvPr/>
         </p:nvSpPr>
@@ -4198,7 +4245,7 @@
       </p:sp>
       <p:sp>
         <p:nvSpPr>
-          <p:cNvPr id="28" name="TextBox 27"/>
+          <p:cNvPr id="29" name="TextBox 28"/>
           <p:cNvSpPr txBox="1"/>
           <p:nvPr/>
         </p:nvSpPr>
@@ -4240,7 +4287,7 @@
       </p:sp>
       <p:sp>
         <p:nvSpPr>
-          <p:cNvPr id="29" name="TextBox 28"/>
+          <p:cNvPr id="30" name="TextBox 29"/>
           <p:cNvSpPr txBox="1"/>
           <p:nvPr/>
         </p:nvSpPr>
@@ -4282,7 +4329,7 @@
       </p:sp>
       <p:sp>
         <p:nvSpPr>
-          <p:cNvPr id="30" name="TextBox 29"/>
+          <p:cNvPr id="31" name="TextBox 30"/>
           <p:cNvSpPr txBox="1"/>
           <p:nvPr/>
         </p:nvSpPr>
@@ -4324,7 +4371,7 @@
       </p:sp>
       <p:sp>
         <p:nvSpPr>
-          <p:cNvPr id="31" name="TextBox 30"/>
+          <p:cNvPr id="32" name="TextBox 31"/>
           <p:cNvSpPr txBox="1"/>
           <p:nvPr/>
         </p:nvSpPr>
@@ -4366,7 +4413,7 @@
       </p:sp>
       <p:sp>
         <p:nvSpPr>
-          <p:cNvPr id="32" name="TextBox 31"/>
+          <p:cNvPr id="33" name="TextBox 32"/>
           <p:cNvSpPr txBox="1"/>
           <p:nvPr/>
         </p:nvSpPr>
@@ -4408,7 +4455,7 @@
       </p:sp>
       <p:sp>
         <p:nvSpPr>
-          <p:cNvPr id="33" name="TextBox 32"/>
+          <p:cNvPr id="34" name="TextBox 33"/>
           <p:cNvSpPr txBox="1"/>
           <p:nvPr/>
         </p:nvSpPr>
@@ -4448,7 +4495,7 @@
       </p:sp>
       <p:sp>
         <p:nvSpPr>
-          <p:cNvPr id="34" name="TextBox 33"/>
+          <p:cNvPr id="35" name="TextBox 34"/>
           <p:cNvSpPr txBox="1"/>
           <p:nvPr/>
         </p:nvSpPr>
@@ -4488,7 +4535,7 @@
       </p:sp>
       <p:sp>
         <p:nvSpPr>
-          <p:cNvPr id="35" name="TextBox 34"/>
+          <p:cNvPr id="36" name="TextBox 35"/>
           <p:cNvSpPr txBox="1"/>
           <p:nvPr/>
         </p:nvSpPr>
@@ -4528,7 +4575,7 @@
       </p:sp>
       <p:sp>
         <p:nvSpPr>
-          <p:cNvPr id="36" name="TextBox 35"/>
+          <p:cNvPr id="37" name="TextBox 36"/>
           <p:cNvSpPr txBox="1"/>
           <p:nvPr/>
         </p:nvSpPr>
@@ -4568,7 +4615,7 @@
       </p:sp>
       <p:sp>
         <p:nvSpPr>
-          <p:cNvPr id="37" name="TextBox 36"/>
+          <p:cNvPr id="38" name="TextBox 37"/>
           <p:cNvSpPr txBox="1"/>
           <p:nvPr/>
         </p:nvSpPr>
@@ -4608,7 +4655,7 @@
       </p:sp>
       <p:sp>
         <p:nvSpPr>
-          <p:cNvPr id="38" name="TextBox 37"/>
+          <p:cNvPr id="39" name="TextBox 38"/>
           <p:cNvSpPr txBox="1"/>
           <p:nvPr/>
         </p:nvSpPr>
@@ -4648,7 +4695,7 @@
       </p:sp>
       <p:sp>
         <p:nvSpPr>
-          <p:cNvPr id="39" name="TextBox 38"/>
+          <p:cNvPr id="40" name="TextBox 39"/>
           <p:cNvSpPr txBox="1"/>
           <p:nvPr/>
         </p:nvSpPr>
@@ -4688,7 +4735,7 @@
       </p:sp>
       <p:sp>
         <p:nvSpPr>
-          <p:cNvPr id="40" name="TextBox 39"/>
+          <p:cNvPr id="41" name="TextBox 40"/>
           <p:cNvSpPr txBox="1"/>
           <p:nvPr/>
         </p:nvSpPr>
@@ -4728,7 +4775,7 @@
       </p:sp>
       <p:sp>
         <p:nvSpPr>
-          <p:cNvPr id="41" name="TextBox 40"/>
+          <p:cNvPr id="42" name="TextBox 41"/>
           <p:cNvSpPr txBox="1"/>
           <p:nvPr/>
         </p:nvSpPr>
@@ -4768,7 +4815,7 @@
       </p:sp>
       <p:sp>
         <p:nvSpPr>
-          <p:cNvPr id="42" name="TextBox 41"/>
+          <p:cNvPr id="43" name="TextBox 42"/>
           <p:cNvSpPr txBox="1"/>
           <p:nvPr/>
         </p:nvSpPr>
@@ -4808,7 +4855,7 @@
       </p:sp>
       <p:sp>
         <p:nvSpPr>
-          <p:cNvPr id="43" name="TextBox 42"/>
+          <p:cNvPr id="44" name="TextBox 43"/>
           <p:cNvSpPr txBox="1"/>
           <p:nvPr/>
         </p:nvSpPr>
@@ -4843,14 +4890,14 @@
                 <a:latin typeface="Noto Sans TC"/>
                 <a:ea typeface="Noto Sans TC"/>
               </a:rPr>
-              <a:t>留白大（頁邊 96px）· 每頁 ≤50 字</a:t>
-            </a:r>
-          </a:p>
-        </p:txBody>
-      </p:sp>
-      <p:sp>
-        <p:nvSpPr>
-          <p:cNvPr id="44" name="TextBox 43"/>
+              <a:t>留白大（頁邊 96px）· 字級不縮，裝不下就拆頁</a:t>
+            </a:r>
+          </a:p>
+        </p:txBody>
+      </p:sp>
+      <p:sp>
+        <p:nvSpPr>
+          <p:cNvPr id="45" name="TextBox 44"/>
           <p:cNvSpPr txBox="1"/>
           <p:nvPr/>
         </p:nvSpPr>
@@ -4890,7 +4937,7 @@
       </p:sp>
       <p:sp>
         <p:nvSpPr>
-          <p:cNvPr id="45" name="TextBox 44"/>
+          <p:cNvPr id="46" name="TextBox 45"/>
           <p:cNvSpPr txBox="1"/>
           <p:nvPr/>
         </p:nvSpPr>
@@ -4930,7 +4977,7 @@
       </p:sp>
       <p:sp>
         <p:nvSpPr>
-          <p:cNvPr id="46" name="TextBox 45"/>
+          <p:cNvPr id="47" name="TextBox 46"/>
           <p:cNvSpPr txBox="1"/>
           <p:nvPr/>
         </p:nvSpPr>
@@ -4970,7 +5017,7 @@
       </p:sp>
       <p:sp>
         <p:nvSpPr>
-          <p:cNvPr id="47" name="TextBox 46"/>
+          <p:cNvPr id="48" name="TextBox 47"/>
           <p:cNvSpPr txBox="1"/>
           <p:nvPr/>
         </p:nvSpPr>
@@ -5010,7 +5057,7 @@
       </p:sp>
       <p:sp>
         <p:nvSpPr>
-          <p:cNvPr id="48" name="TextBox 47"/>
+          <p:cNvPr id="49" name="TextBox 48"/>
           <p:cNvSpPr txBox="1"/>
           <p:nvPr/>
         </p:nvSpPr>
@@ -5050,14 +5097,14 @@
       </p:sp>
       <p:sp>
         <p:nvSpPr>
-          <p:cNvPr id="49" name="TextBox 48"/>
+          <p:cNvPr id="50" name="TextBox 49"/>
           <p:cNvSpPr txBox="1"/>
           <p:nvPr/>
         </p:nvSpPr>
         <p:spPr>
           <a:xfrm>
             <a:off x="9026425" y="4788991"/>
-            <a:ext cx="923925" cy="314325"/>
+            <a:ext cx="676275" cy="314325"/>
           </a:xfrm>
           <a:prstGeom prst="rect">
             <a:avLst/>
@@ -5083,21 +5130,21 @@
                 <a:latin typeface="Noto Sans TC"/>
                 <a:ea typeface="Noto Sans TC"/>
               </a:rPr>
-              <a:t>一頁一數字</a:t>
-            </a:r>
-          </a:p>
-        </p:txBody>
-      </p:sp>
-      <p:sp>
-        <p:nvSpPr>
-          <p:cNvPr id="50" name="TextBox 49"/>
+              <a:t>長文頁</a:t>
+            </a:r>
+          </a:p>
+        </p:txBody>
+      </p:sp>
+      <p:sp>
+        <p:nvSpPr>
+          <p:cNvPr id="51" name="TextBox 50"/>
           <p:cNvSpPr txBox="1"/>
           <p:nvPr/>
         </p:nvSpPr>
         <p:spPr>
           <a:xfrm>
-            <a:off x="9969400" y="4788991"/>
-            <a:ext cx="676275" cy="314325"/>
+            <a:off x="9721750" y="4788991"/>
+            <a:ext cx="923925" cy="314325"/>
           </a:xfrm>
           <a:prstGeom prst="rect">
             <a:avLst/>
@@ -5123,21 +5170,21 @@
                 <a:latin typeface="Noto Sans TC"/>
                 <a:ea typeface="Noto Sans TC"/>
               </a:rPr>
-              <a:t>章節頁</a:t>
-            </a:r>
-          </a:p>
-        </p:txBody>
-      </p:sp>
-      <p:sp>
-        <p:nvSpPr>
-          <p:cNvPr id="51" name="TextBox 50"/>
+              <a:t>一頁一數字</a:t>
+            </a:r>
+          </a:p>
+        </p:txBody>
+      </p:sp>
+      <p:sp>
+        <p:nvSpPr>
+          <p:cNvPr id="52" name="TextBox 51"/>
           <p:cNvSpPr txBox="1"/>
           <p:nvPr/>
         </p:nvSpPr>
         <p:spPr>
           <a:xfrm>
             <a:off x="8207275" y="5141416"/>
-            <a:ext cx="800100" cy="314325"/>
+            <a:ext cx="676275" cy="314325"/>
           </a:xfrm>
           <a:prstGeom prst="rect">
             <a:avLst/>
@@ -5163,21 +5210,21 @@
                 <a:latin typeface="Noto Sans TC"/>
                 <a:ea typeface="Noto Sans TC"/>
               </a:rPr>
-              <a:t>步驟流程</a:t>
-            </a:r>
-          </a:p>
-        </p:txBody>
-      </p:sp>
-      <p:sp>
-        <p:nvSpPr>
-          <p:cNvPr id="52" name="TextBox 51"/>
+              <a:t>章節頁</a:t>
+            </a:r>
+          </a:p>
+        </p:txBody>
+      </p:sp>
+      <p:sp>
+        <p:nvSpPr>
+          <p:cNvPr id="53" name="TextBox 52"/>
           <p:cNvSpPr txBox="1"/>
           <p:nvPr/>
         </p:nvSpPr>
         <p:spPr>
           <a:xfrm>
-            <a:off x="9026425" y="5141416"/>
-            <a:ext cx="552450" cy="314325"/>
+            <a:off x="8902600" y="5141416"/>
+            <a:ext cx="800100" cy="314325"/>
           </a:xfrm>
           <a:prstGeom prst="rect">
             <a:avLst/>
@@ -5203,6 +5250,46 @@
                 <a:latin typeface="Noto Sans TC"/>
                 <a:ea typeface="Noto Sans TC"/>
               </a:rPr>
+              <a:t>步驟流程</a:t>
+            </a:r>
+          </a:p>
+        </p:txBody>
+      </p:sp>
+      <p:sp>
+        <p:nvSpPr>
+          <p:cNvPr id="54" name="TextBox 53"/>
+          <p:cNvSpPr txBox="1"/>
+          <p:nvPr/>
+        </p:nvSpPr>
+        <p:spPr>
+          <a:xfrm>
+            <a:off x="9721750" y="5141416"/>
+            <a:ext cx="552450" cy="314325"/>
+          </a:xfrm>
+          <a:prstGeom prst="rect">
+            <a:avLst/>
+          </a:prstGeom>
+          <a:noFill/>
+        </p:spPr>
+        <p:txBody>
+          <a:bodyPr wrap="square" lIns="0" rIns="0" tIns="0" bIns="0" anchor="t">
+            <a:spAutoFit/>
+          </a:bodyPr>
+          <a:lstStyle/>
+          <a:p>
+            <a:pPr algn="l">
+              <a:lnSpc>
+                <a:spcPts val="2175"/>
+              </a:lnSpc>
+            </a:pPr>
+            <a:r>
+              <a:rPr sz="975" b="0">
+                <a:solidFill>
+                  <a:srgbClr val="7DD3FC"/>
+                </a:solidFill>
+                <a:latin typeface="Noto Sans TC"/>
+                <a:ea typeface="Noto Sans TC"/>
+              </a:rPr>
               <a:t>封底</a:t>
             </a:r>
           </a:p>
@@ -5210,7 +5297,7 @@
       </p:sp>
       <p:sp>
         <p:nvSpPr>
-          <p:cNvPr id="53" name="TextBox 52"/>
+          <p:cNvPr id="55" name="TextBox 54"/>
           <p:cNvSpPr txBox="1"/>
           <p:nvPr/>
         </p:nvSpPr>
@@ -5244,6 +5331,208 @@
                 <a:ea typeface="Noto Sans TC"/>
               </a:rPr>
               <a:t>01</a:t>
+            </a:r>
+          </a:p>
+        </p:txBody>
+      </p:sp>
+    </p:spTree>
+  </p:cSld>
+  <p:clrMapOvr>
+    <a:masterClrMapping/>
+  </p:clrMapOvr>
+</p:sld>
+</file>
+
+<file path=ppt/slides/slide10.xml><?xml version="1.0" encoding="utf-8"?>
+<p:sld xmlns:a="http://schemas.openxmlformats.org/drawingml/2006/main" xmlns:p="http://schemas.openxmlformats.org/presentationml/2006/main" xmlns:r="http://schemas.openxmlformats.org/officeDocument/2006/relationships">
+  <p:cSld>
+    <p:spTree>
+      <p:nvGrpSpPr>
+        <p:cNvPr id="1" name=""/>
+        <p:cNvGrpSpPr/>
+        <p:nvPr/>
+      </p:nvGrpSpPr>
+      <p:grpSpPr/>
+      <p:pic>
+        <p:nvPicPr>
+          <p:cNvPr id="2" name="Picture 1" descr="tech-1-bake.jpg"/>
+          <p:cNvPicPr>
+            <a:picLocks noChangeAspect="1"/>
+          </p:cNvPicPr>
+          <p:nvPr/>
+        </p:nvPicPr>
+        <p:blipFill>
+          <a:blip r:embed="rId2"/>
+          <a:stretch>
+            <a:fillRect/>
+          </a:stretch>
+        </p:blipFill>
+        <p:spPr>
+          <a:xfrm>
+            <a:off x="0" y="0"/>
+            <a:ext cx="12192000" cy="6858000"/>
+          </a:xfrm>
+          <a:prstGeom prst="rect">
+            <a:avLst/>
+          </a:prstGeom>
+        </p:spPr>
+      </p:pic>
+      <p:sp>
+        <p:nvSpPr>
+          <p:cNvPr id="3" name="TextBox 2"/>
+          <p:cNvSpPr txBox="1"/>
+          <p:nvPr/>
+        </p:nvSpPr>
+        <p:spPr>
+          <a:xfrm>
+            <a:off x="9931003" y="533400"/>
+            <a:ext cx="1403746" cy="285750"/>
+          </a:xfrm>
+          <a:prstGeom prst="rect">
+            <a:avLst/>
+          </a:prstGeom>
+          <a:noFill/>
+        </p:spPr>
+        <p:txBody>
+          <a:bodyPr wrap="square" lIns="0" rIns="0" tIns="0" bIns="0" anchor="t">
+            <a:spAutoFit/>
+          </a:bodyPr>
+          <a:lstStyle/>
+          <a:p>
+            <a:pPr algn="l">
+              <a:lnSpc>
+                <a:spcPts val="1950"/>
+              </a:lnSpc>
+            </a:pPr>
+            <a:r>
+              <a:rPr sz="1350" b="1" spc="405">
+                <a:solidFill>
+                  <a:srgbClr val="7DD3FC"/>
+                </a:solidFill>
+                <a:latin typeface="Noto Sans TC"/>
+                <a:ea typeface="Noto Sans TC"/>
+              </a:rPr>
+              <a:t>Nova Labs</a:t>
+            </a:r>
+          </a:p>
+        </p:txBody>
+      </p:sp>
+      <p:sp>
+        <p:nvSpPr>
+          <p:cNvPr id="4" name="TextBox 3"/>
+          <p:cNvSpPr txBox="1"/>
+          <p:nvPr/>
+        </p:nvSpPr>
+        <p:spPr>
+          <a:xfrm>
+            <a:off x="914400" y="2861369"/>
+            <a:ext cx="10420350" cy="533400"/>
+          </a:xfrm>
+          <a:prstGeom prst="rect">
+            <a:avLst/>
+          </a:prstGeom>
+          <a:noFill/>
+        </p:spPr>
+        <p:txBody>
+          <a:bodyPr wrap="square" lIns="0" rIns="0" tIns="0" bIns="0" anchor="t">
+            <a:spAutoFit/>
+          </a:bodyPr>
+          <a:lstStyle/>
+          <a:p>
+            <a:pPr algn="l">
+              <a:lnSpc>
+                <a:spcPts val="3900"/>
+              </a:lnSpc>
+            </a:pPr>
+            <a:r>
+              <a:rPr sz="3000" b="1">
+                <a:solidFill>
+                  <a:srgbClr val="7DD3FC"/>
+                </a:solidFill>
+                <a:latin typeface="Noto Sans TC"/>
+                <a:ea typeface="Noto Sans TC"/>
+              </a:rPr>
+              <a:t>不用等，就是最好的功能。</a:t>
+            </a:r>
+          </a:p>
+        </p:txBody>
+      </p:sp>
+      <p:sp>
+        <p:nvSpPr>
+          <p:cNvPr id="5" name="TextBox 4"/>
+          <p:cNvSpPr txBox="1"/>
+          <p:nvPr/>
+        </p:nvSpPr>
+        <p:spPr>
+          <a:xfrm>
+            <a:off x="914400" y="3661469"/>
+            <a:ext cx="10420350" cy="373260"/>
+          </a:xfrm>
+          <a:prstGeom prst="rect">
+            <a:avLst/>
+          </a:prstGeom>
+          <a:noFill/>
+        </p:spPr>
+        <p:txBody>
+          <a:bodyPr wrap="square" lIns="0" rIns="0" tIns="0" bIns="0" anchor="t">
+            <a:spAutoFit/>
+          </a:bodyPr>
+          <a:lstStyle/>
+          <a:p>
+            <a:pPr algn="l">
+              <a:lnSpc>
+                <a:spcPts val="2640"/>
+              </a:lnSpc>
+            </a:pPr>
+            <a:r>
+              <a:rPr sz="1650" b="0">
+                <a:solidFill>
+                  <a:srgbClr val="7DD3FC"/>
+                </a:solidFill>
+                <a:latin typeface="Noto Sans TC"/>
+                <a:ea typeface="Noto Sans TC"/>
+              </a:rPr>
+              <a:t>team@novalabs.example（示意，換成你的）</a:t>
+            </a:r>
+          </a:p>
+        </p:txBody>
+      </p:sp>
+      <p:sp>
+        <p:nvSpPr>
+          <p:cNvPr id="6" name="TextBox 5"/>
+          <p:cNvSpPr txBox="1"/>
+          <p:nvPr/>
+        </p:nvSpPr>
+        <p:spPr>
+          <a:xfrm>
+            <a:off x="11134873" y="6362700"/>
+            <a:ext cx="199876" cy="228600"/>
+          </a:xfrm>
+          <a:prstGeom prst="rect">
+            <a:avLst/>
+          </a:prstGeom>
+          <a:noFill/>
+        </p:spPr>
+        <p:txBody>
+          <a:bodyPr wrap="square" lIns="0" rIns="0" tIns="0" bIns="0" anchor="t">
+            <a:spAutoFit/>
+          </a:bodyPr>
+          <a:lstStyle/>
+          <a:p>
+            <a:pPr algn="l">
+              <a:lnSpc>
+                <a:spcPts val="1500"/>
+              </a:lnSpc>
+            </a:pPr>
+            <a:r>
+              <a:rPr sz="1050" b="0">
+                <a:solidFill>
+                  <a:srgbClr val="7DD3FC"/>
+                </a:solidFill>
+                <a:latin typeface="Noto Sans TC"/>
+                <a:ea typeface="Noto Sans TC"/>
+              </a:rPr>
+              <a:t>10</a:t>
             </a:r>
           </a:p>
         </p:txBody>
@@ -6841,8 +7130,8 @@
         </p:nvSpPr>
         <p:spPr>
           <a:xfrm>
-            <a:off x="914400" y="1973609"/>
-            <a:ext cx="10420350" cy="1943100"/>
+            <a:off x="914400" y="914400"/>
+            <a:ext cx="10420350" cy="533400"/>
           </a:xfrm>
           <a:prstGeom prst="rect">
             <a:avLst/>
@@ -6857,18 +7146,18 @@
           <a:p>
             <a:pPr algn="l">
               <a:lnSpc>
-                <a:spcPts val="15000"/>
+                <a:spcPts val="3900"/>
               </a:lnSpc>
             </a:pPr>
             <a:r>
-              <a:rPr sz="15000" b="1">
-                <a:solidFill>
-                  <a:srgbClr val="F59E0B"/>
+              <a:rPr sz="3000" b="1">
+                <a:solidFill>
+                  <a:srgbClr val="7DD3FC"/>
                 </a:solidFill>
                 <a:latin typeface="Noto Sans TC"/>
                 <a:ea typeface="Noto Sans TC"/>
               </a:rPr>
-              <a:t>99.98%</a:t>
+              <a:t>內文多的時候</a:t>
             </a:r>
           </a:p>
         </p:txBody>
@@ -6881,8 +7170,8 @@
         </p:nvSpPr>
         <p:spPr>
           <a:xfrm>
-            <a:off x="914400" y="4107209"/>
-            <a:ext cx="6153150" cy="373260"/>
+            <a:off x="914400" y="2193131"/>
+            <a:ext cx="9963150" cy="708421"/>
           </a:xfrm>
           <a:prstGeom prst="rect">
             <a:avLst/>
@@ -6908,7 +7197,7 @@
                 <a:latin typeface="Noto Sans TC"/>
                 <a:ea typeface="Noto Sans TC"/>
               </a:rPr>
-              <a:t>過去 12 個月的服務可用率。</a:t>
+              <a:t>這一頁是假字，用來示範內文很多的時候版面長什麼樣。字級還是 22，行距照大腦的設定，段落一段接一段往下排，不因為字多就把字縮小，也不把留白吃掉。</a:t>
             </a:r>
           </a:p>
         </p:txBody>
@@ -6921,8 +7210,8 @@
         </p:nvSpPr>
         <p:spPr>
           <a:xfrm>
-            <a:off x="914400" y="4670970"/>
-            <a:ext cx="6153150" cy="251370"/>
+            <a:off x="914400" y="3034903"/>
+            <a:ext cx="9963150" cy="708421"/>
           </a:xfrm>
           <a:prstGeom prst="rect">
             <a:avLst/>
@@ -6937,20 +7226,18 @@
           <a:p>
             <a:pPr algn="l">
               <a:lnSpc>
-                <a:spcPts val="1679"/>
+                <a:spcPts val="2640"/>
               </a:lnSpc>
             </a:pPr>
             <a:r>
-              <a:rPr sz="1050" b="0">
-                <a:solidFill>
-                  <a:srgbClr val="7DD3FC">
-                    <a:alpha val="85000"/>
-                  </a:srgbClr>
+              <a:rPr sz="1650" b="0">
+                <a:solidFill>
+                  <a:srgbClr val="E5E7EB"/>
                 </a:solidFill>
                 <a:latin typeface="Noto Sans TC"/>
                 <a:ea typeface="Noto Sans TC"/>
               </a:rPr>
-              <a:t>示意數字，換成你的。</a:t>
+              <a:t>假字假字，這裡通常會放一段背景說明：為什麼要做這件事、之前試過什麼、現在卡在哪裡。寫的時候一段只講一個重點，讀的人才跟得上，講的人也不會念到一半迷路。</a:t>
             </a:r>
           </a:p>
         </p:txBody>
@@ -6958,6 +7245,86 @@
       <p:sp>
         <p:nvSpPr>
           <p:cNvPr id="7" name="TextBox 6"/>
+          <p:cNvSpPr txBox="1"/>
+          <p:nvPr/>
+        </p:nvSpPr>
+        <p:spPr>
+          <a:xfrm>
+            <a:off x="914400" y="3876675"/>
+            <a:ext cx="9963150" cy="708421"/>
+          </a:xfrm>
+          <a:prstGeom prst="rect">
+            <a:avLst/>
+          </a:prstGeom>
+          <a:noFill/>
+        </p:spPr>
+        <p:txBody>
+          <a:bodyPr wrap="square" lIns="0" rIns="0" tIns="0" bIns="0" anchor="t">
+            <a:spAutoFit/>
+          </a:bodyPr>
+          <a:lstStyle/>
+          <a:p>
+            <a:pPr algn="l">
+              <a:lnSpc>
+                <a:spcPts val="2640"/>
+              </a:lnSpc>
+            </a:pPr>
+            <a:r>
+              <a:rPr sz="1650" b="0">
+                <a:solidFill>
+                  <a:srgbClr val="E5E7EB"/>
+                </a:solidFill>
+                <a:latin typeface="Noto Sans TC"/>
+                <a:ea typeface="Noto Sans TC"/>
+              </a:rPr>
+              <a:t>內文到這個量大概就是一頁的上限。再多就拆成兩頁，或改用三欄重點、步驟流程把重點並列；不要縮字硬塞，也不要把行距壓扁，那樣看起來就不像同一份簡報了。</a:t>
+            </a:r>
+          </a:p>
+        </p:txBody>
+      </p:sp>
+      <p:sp>
+        <p:nvSpPr>
+          <p:cNvPr id="8" name="TextBox 7"/>
+          <p:cNvSpPr txBox="1"/>
+          <p:nvPr/>
+        </p:nvSpPr>
+        <p:spPr>
+          <a:xfrm>
+            <a:off x="914400" y="4718446"/>
+            <a:ext cx="9963150" cy="708421"/>
+          </a:xfrm>
+          <a:prstGeom prst="rect">
+            <a:avLst/>
+          </a:prstGeom>
+          <a:noFill/>
+        </p:spPr>
+        <p:txBody>
+          <a:bodyPr wrap="square" lIns="0" rIns="0" tIns="0" bIns="0" anchor="t">
+            <a:spAutoFit/>
+          </a:bodyPr>
+          <a:lstStyle/>
+          <a:p>
+            <a:pPr algn="l">
+              <a:lnSpc>
+                <a:spcPts val="2640"/>
+              </a:lnSpc>
+            </a:pPr>
+            <a:r>
+              <a:rPr sz="1650" b="0">
+                <a:solidFill>
+                  <a:srgbClr val="E5E7EB"/>
+                </a:solidFill>
+                <a:latin typeface="Noto Sans TC"/>
+                <a:ea typeface="Noto Sans TC"/>
+              </a:rPr>
+              <a:t>最後一段留給補充：數字要有出處、名詞前後一致、日期用絕對值。這些寫在大腦的禁區裡，AI 排版時會照做，你交件前只要對一次就好。</a:t>
+            </a:r>
+          </a:p>
+        </p:txBody>
+      </p:sp>
+      <p:sp>
+        <p:nvSpPr>
+          <p:cNvPr id="9" name="TextBox 8"/>
           <p:cNvSpPr txBox="1"/>
           <p:nvPr/>
         </p:nvSpPr>
@@ -7085,8 +7452,8 @@
         </p:nvSpPr>
         <p:spPr>
           <a:xfrm>
-            <a:off x="914400" y="2472630"/>
-            <a:ext cx="10420350" cy="1181100"/>
+            <a:off x="914400" y="1973609"/>
+            <a:ext cx="10420350" cy="1943100"/>
           </a:xfrm>
           <a:prstGeom prst="rect">
             <a:avLst/>
@@ -7101,20 +7468,18 @@
           <a:p>
             <a:pPr algn="l">
               <a:lnSpc>
-                <a:spcPts val="9000"/>
+                <a:spcPts val="15000"/>
               </a:lnSpc>
             </a:pPr>
             <a:r>
-              <a:rPr sz="9000" b="1">
-                <a:solidFill>
-                  <a:srgbClr val="7DD3FC">
-                    <a:alpha val="35000"/>
-                  </a:srgbClr>
+              <a:rPr sz="15000" b="1">
+                <a:solidFill>
+                  <a:srgbClr val="F59E0B"/>
                 </a:solidFill>
                 <a:latin typeface="Noto Sans TC"/>
                 <a:ea typeface="Noto Sans TC"/>
               </a:rPr>
-              <a:t>02</a:t>
+              <a:t>99.98%</a:t>
             </a:r>
           </a:p>
         </p:txBody>
@@ -7127,8 +7492,8 @@
         </p:nvSpPr>
         <p:spPr>
           <a:xfrm>
-            <a:off x="914400" y="3691830"/>
-            <a:ext cx="10420350" cy="731490"/>
+            <a:off x="914400" y="4107209"/>
+            <a:ext cx="6153150" cy="373260"/>
           </a:xfrm>
           <a:prstGeom prst="rect">
             <a:avLst/>
@@ -7143,18 +7508,18 @@
           <a:p>
             <a:pPr algn="l">
               <a:lnSpc>
-                <a:spcPts val="5459"/>
+                <a:spcPts val="2640"/>
               </a:lnSpc>
             </a:pPr>
             <a:r>
-              <a:rPr sz="4200" b="1">
-                <a:solidFill>
-                  <a:srgbClr val="7DD3FC"/>
+              <a:rPr sz="1650" b="0">
+                <a:solidFill>
+                  <a:srgbClr val="E5E7EB"/>
                 </a:solidFill>
                 <a:latin typeface="Noto Sans TC"/>
                 <a:ea typeface="Noto Sans TC"/>
               </a:rPr>
-              <a:t>導入</a:t>
+              <a:t>過去 12 個月的服務可用率。</a:t>
             </a:r>
           </a:p>
         </p:txBody>
@@ -7162,6 +7527,48 @@
       <p:sp>
         <p:nvSpPr>
           <p:cNvPr id="6" name="TextBox 5"/>
+          <p:cNvSpPr txBox="1"/>
+          <p:nvPr/>
+        </p:nvSpPr>
+        <p:spPr>
+          <a:xfrm>
+            <a:off x="914400" y="4670970"/>
+            <a:ext cx="6153150" cy="251370"/>
+          </a:xfrm>
+          <a:prstGeom prst="rect">
+            <a:avLst/>
+          </a:prstGeom>
+          <a:noFill/>
+        </p:spPr>
+        <p:txBody>
+          <a:bodyPr wrap="square" lIns="0" rIns="0" tIns="0" bIns="0" anchor="t">
+            <a:spAutoFit/>
+          </a:bodyPr>
+          <a:lstStyle/>
+          <a:p>
+            <a:pPr algn="l">
+              <a:lnSpc>
+                <a:spcPts val="1679"/>
+              </a:lnSpc>
+            </a:pPr>
+            <a:r>
+              <a:rPr sz="1050" b="0">
+                <a:solidFill>
+                  <a:srgbClr val="7DD3FC">
+                    <a:alpha val="85000"/>
+                  </a:srgbClr>
+                </a:solidFill>
+                <a:latin typeface="Noto Sans TC"/>
+                <a:ea typeface="Noto Sans TC"/>
+              </a:rPr>
+              <a:t>示意數字，換成你的。</a:t>
+            </a:r>
+          </a:p>
+        </p:txBody>
+      </p:sp>
+      <p:sp>
+        <p:nvSpPr>
+          <p:cNvPr id="7" name="TextBox 6"/>
           <p:cNvSpPr txBox="1"/>
           <p:nvPr/>
         </p:nvSpPr>
@@ -7243,157 +7650,7 @@
       </p:pic>
       <p:sp>
         <p:nvSpPr>
-          <p:cNvPr id="3" name="Rounded Rectangle 2"/>
-          <p:cNvSpPr/>
-          <p:nvPr/>
-        </p:nvSpPr>
-        <p:spPr>
-          <a:xfrm>
-            <a:off x="914400" y="2741414"/>
-            <a:ext cx="3200400" cy="2099071"/>
-          </a:xfrm>
-          <a:prstGeom prst="roundRect">
-            <a:avLst>
-              <a:gd name="adj" fmla="val 9075"/>
-            </a:avLst>
-          </a:prstGeom>
-          <a:solidFill>
-            <a:srgbClr val="E5E7EB">
-              <a:alpha val="6000"/>
-            </a:srgbClr>
-          </a:solidFill>
-          <a:ln w="9525">
-            <a:solidFill>
-              <a:srgbClr val="E5E7EB">
-                <a:alpha val="16000"/>
-              </a:srgbClr>
-            </a:solidFill>
-          </a:ln>
-          <a:effectLst/>
-        </p:spPr>
-        <p:style>
-          <a:lnRef idx="1">
-            <a:schemeClr val="accent1"/>
-          </a:lnRef>
-          <a:fillRef idx="3">
-            <a:schemeClr val="accent1"/>
-          </a:fillRef>
-          <a:effectRef idx="2">
-            <a:schemeClr val="accent1"/>
-          </a:effectRef>
-          <a:fontRef idx="minor">
-            <a:schemeClr val="lt1"/>
-          </a:fontRef>
-        </p:style>
-        <p:txBody>
-          <a:bodyPr rtlCol="0" anchor="ctr"/>
-          <a:lstStyle/>
-          <a:p/>
-        </p:txBody>
-      </p:sp>
-      <p:sp>
-        <p:nvSpPr>
-          <p:cNvPr id="4" name="Rounded Rectangle 3"/>
-          <p:cNvSpPr/>
-          <p:nvPr/>
-        </p:nvSpPr>
-        <p:spPr>
-          <a:xfrm>
-            <a:off x="4495800" y="2741414"/>
-            <a:ext cx="3200400" cy="2099071"/>
-          </a:xfrm>
-          <a:prstGeom prst="roundRect">
-            <a:avLst>
-              <a:gd name="adj" fmla="val 9075"/>
-            </a:avLst>
-          </a:prstGeom>
-          <a:solidFill>
-            <a:srgbClr val="E5E7EB">
-              <a:alpha val="6000"/>
-            </a:srgbClr>
-          </a:solidFill>
-          <a:ln w="9525">
-            <a:solidFill>
-              <a:srgbClr val="E5E7EB">
-                <a:alpha val="16000"/>
-              </a:srgbClr>
-            </a:solidFill>
-          </a:ln>
-          <a:effectLst/>
-        </p:spPr>
-        <p:style>
-          <a:lnRef idx="1">
-            <a:schemeClr val="accent1"/>
-          </a:lnRef>
-          <a:fillRef idx="3">
-            <a:schemeClr val="accent1"/>
-          </a:fillRef>
-          <a:effectRef idx="2">
-            <a:schemeClr val="accent1"/>
-          </a:effectRef>
-          <a:fontRef idx="minor">
-            <a:schemeClr val="lt1"/>
-          </a:fontRef>
-        </p:style>
-        <p:txBody>
-          <a:bodyPr rtlCol="0" anchor="ctr"/>
-          <a:lstStyle/>
-          <a:p/>
-        </p:txBody>
-      </p:sp>
-      <p:sp>
-        <p:nvSpPr>
-          <p:cNvPr id="5" name="Rounded Rectangle 4"/>
-          <p:cNvSpPr/>
-          <p:nvPr/>
-        </p:nvSpPr>
-        <p:spPr>
-          <a:xfrm>
-            <a:off x="8077200" y="2741414"/>
-            <a:ext cx="3200400" cy="2099071"/>
-          </a:xfrm>
-          <a:prstGeom prst="roundRect">
-            <a:avLst>
-              <a:gd name="adj" fmla="val 9075"/>
-            </a:avLst>
-          </a:prstGeom>
-          <a:solidFill>
-            <a:srgbClr val="E5E7EB">
-              <a:alpha val="6000"/>
-            </a:srgbClr>
-          </a:solidFill>
-          <a:ln w="9525">
-            <a:solidFill>
-              <a:srgbClr val="E5E7EB">
-                <a:alpha val="16000"/>
-              </a:srgbClr>
-            </a:solidFill>
-          </a:ln>
-          <a:effectLst/>
-        </p:spPr>
-        <p:style>
-          <a:lnRef idx="1">
-            <a:schemeClr val="accent1"/>
-          </a:lnRef>
-          <a:fillRef idx="3">
-            <a:schemeClr val="accent1"/>
-          </a:fillRef>
-          <a:effectRef idx="2">
-            <a:schemeClr val="accent1"/>
-          </a:effectRef>
-          <a:fontRef idx="minor">
-            <a:schemeClr val="lt1"/>
-          </a:fontRef>
-        </p:style>
-        <p:txBody>
-          <a:bodyPr rtlCol="0" anchor="ctr"/>
-          <a:lstStyle/>
-          <a:p/>
-        </p:txBody>
-      </p:sp>
-      <p:sp>
-        <p:nvSpPr>
-          <p:cNvPr id="6" name="TextBox 5"/>
+          <p:cNvPr id="3" name="TextBox 2"/>
           <p:cNvSpPr txBox="1"/>
           <p:nvPr/>
         </p:nvSpPr>
@@ -7433,14 +7690,14 @@
       </p:sp>
       <p:sp>
         <p:nvSpPr>
-          <p:cNvPr id="7" name="TextBox 6"/>
+          <p:cNvPr id="4" name="TextBox 3"/>
           <p:cNvSpPr txBox="1"/>
           <p:nvPr/>
         </p:nvSpPr>
         <p:spPr>
           <a:xfrm>
-            <a:off x="914400" y="914400"/>
-            <a:ext cx="10420350" cy="533400"/>
+            <a:off x="914400" y="2472630"/>
+            <a:ext cx="10420350" cy="1181100"/>
           </a:xfrm>
           <a:prstGeom prst="rect">
             <a:avLst/>
@@ -7455,173 +7712,15 @@
           <a:p>
             <a:pPr algn="l">
               <a:lnSpc>
-                <a:spcPts val="3900"/>
+                <a:spcPts val="9000"/>
               </a:lnSpc>
             </a:pPr>
             <a:r>
-              <a:rPr sz="3000" b="1">
-                <a:solidFill>
-                  <a:srgbClr val="7DD3FC"/>
-                </a:solidFill>
-                <a:latin typeface="Noto Sans TC"/>
-                <a:ea typeface="Noto Sans TC"/>
-              </a:rPr>
-              <a:t>三步開始</a:t>
-            </a:r>
-          </a:p>
-        </p:txBody>
-      </p:sp>
-      <p:sp>
-        <p:nvSpPr>
-          <p:cNvPr id="8" name="TextBox 7"/>
-          <p:cNvSpPr txBox="1"/>
-          <p:nvPr/>
-        </p:nvSpPr>
-        <p:spPr>
-          <a:xfrm>
-            <a:off x="1228725" y="3017639"/>
-            <a:ext cx="2628900" cy="419100"/>
-          </a:xfrm>
-          <a:prstGeom prst="rect">
-            <a:avLst/>
-          </a:prstGeom>
-          <a:noFill/>
-        </p:spPr>
-        <p:txBody>
-          <a:bodyPr wrap="square" lIns="0" rIns="0" tIns="0" bIns="0" anchor="t">
-            <a:spAutoFit/>
-          </a:bodyPr>
-          <a:lstStyle/>
-          <a:p>
-            <a:pPr algn="l">
-              <a:lnSpc>
-                <a:spcPts val="3000"/>
-              </a:lnSpc>
-            </a:pPr>
-            <a:r>
-              <a:rPr sz="3000" b="1">
-                <a:solidFill>
-                  <a:srgbClr val="F59E0B"/>
-                </a:solidFill>
-                <a:latin typeface="Noto Sans TC"/>
-                <a:ea typeface="Noto Sans TC"/>
-              </a:rPr>
-              <a:t>01</a:t>
-            </a:r>
-          </a:p>
-        </p:txBody>
-      </p:sp>
-      <p:sp>
-        <p:nvSpPr>
-          <p:cNvPr id="9" name="TextBox 8"/>
-          <p:cNvSpPr txBox="1"/>
-          <p:nvPr/>
-        </p:nvSpPr>
-        <p:spPr>
-          <a:xfrm>
-            <a:off x="1228725" y="3531989"/>
-            <a:ext cx="2628900" cy="342900"/>
-          </a:xfrm>
-          <a:prstGeom prst="rect">
-            <a:avLst/>
-          </a:prstGeom>
-          <a:noFill/>
-        </p:spPr>
-        <p:txBody>
-          <a:bodyPr wrap="square" lIns="0" rIns="0" tIns="0" bIns="0" anchor="t">
-            <a:spAutoFit/>
-          </a:bodyPr>
-          <a:lstStyle/>
-          <a:p>
-            <a:pPr algn="l">
-              <a:lnSpc>
-                <a:spcPts val="2400"/>
-              </a:lnSpc>
-            </a:pPr>
-            <a:r>
-              <a:rPr sz="1650" b="0">
-                <a:solidFill>
-                  <a:srgbClr val="7DD3FC"/>
-                </a:solidFill>
-                <a:latin typeface="Noto Sans TC"/>
-                <a:ea typeface="Noto Sans TC"/>
-              </a:rPr>
-              <a:t>接上</a:t>
-            </a:r>
-          </a:p>
-        </p:txBody>
-      </p:sp>
-      <p:sp>
-        <p:nvSpPr>
-          <p:cNvPr id="10" name="TextBox 9"/>
-          <p:cNvSpPr txBox="1"/>
-          <p:nvPr/>
-        </p:nvSpPr>
-        <p:spPr>
-          <a:xfrm>
-            <a:off x="1228725" y="3893939"/>
-            <a:ext cx="2628900" cy="373260"/>
-          </a:xfrm>
-          <a:prstGeom prst="rect">
-            <a:avLst/>
-          </a:prstGeom>
-          <a:noFill/>
-        </p:spPr>
-        <p:txBody>
-          <a:bodyPr wrap="square" lIns="0" rIns="0" tIns="0" bIns="0" anchor="t">
-            <a:spAutoFit/>
-          </a:bodyPr>
-          <a:lstStyle/>
-          <a:p>
-            <a:pPr algn="l">
-              <a:lnSpc>
-                <a:spcPts val="2640"/>
-              </a:lnSpc>
-            </a:pPr>
-            <a:r>
-              <a:rPr sz="1650" b="0">
-                <a:solidFill>
-                  <a:srgbClr val="E5E7EB"/>
-                </a:solidFill>
-                <a:latin typeface="Noto Sans TC"/>
-                <a:ea typeface="Noto Sans TC"/>
-              </a:rPr>
-              <a:t>API 金鑰，三行程式。</a:t>
-            </a:r>
-          </a:p>
-        </p:txBody>
-      </p:sp>
-      <p:sp>
-        <p:nvSpPr>
-          <p:cNvPr id="11" name="TextBox 10"/>
-          <p:cNvSpPr txBox="1"/>
-          <p:nvPr/>
-        </p:nvSpPr>
-        <p:spPr>
-          <a:xfrm>
-            <a:off x="4810125" y="3017639"/>
-            <a:ext cx="2628900" cy="419100"/>
-          </a:xfrm>
-          <a:prstGeom prst="rect">
-            <a:avLst/>
-          </a:prstGeom>
-          <a:noFill/>
-        </p:spPr>
-        <p:txBody>
-          <a:bodyPr wrap="square" lIns="0" rIns="0" tIns="0" bIns="0" anchor="t">
-            <a:spAutoFit/>
-          </a:bodyPr>
-          <a:lstStyle/>
-          <a:p>
-            <a:pPr algn="l">
-              <a:lnSpc>
-                <a:spcPts val="3000"/>
-              </a:lnSpc>
-            </a:pPr>
-            <a:r>
-              <a:rPr sz="3000" b="1">
-                <a:solidFill>
-                  <a:srgbClr val="F59E0B"/>
+              <a:rPr sz="9000" b="1">
+                <a:solidFill>
+                  <a:srgbClr val="7DD3FC">
+                    <a:alpha val="35000"/>
+                  </a:srgbClr>
                 </a:solidFill>
                 <a:latin typeface="Noto Sans TC"/>
                 <a:ea typeface="Noto Sans TC"/>
@@ -7633,14 +7732,14 @@
       </p:sp>
       <p:sp>
         <p:nvSpPr>
-          <p:cNvPr id="12" name="TextBox 11"/>
+          <p:cNvPr id="5" name="TextBox 4"/>
           <p:cNvSpPr txBox="1"/>
           <p:nvPr/>
         </p:nvSpPr>
         <p:spPr>
           <a:xfrm>
-            <a:off x="4810125" y="3531989"/>
-            <a:ext cx="2628900" cy="342900"/>
+            <a:off x="914400" y="3691830"/>
+            <a:ext cx="10420350" cy="731490"/>
           </a:xfrm>
           <a:prstGeom prst="rect">
             <a:avLst/>
@@ -7655,185 +7754,25 @@
           <a:p>
             <a:pPr algn="l">
               <a:lnSpc>
-                <a:spcPts val="2400"/>
+                <a:spcPts val="5459"/>
               </a:lnSpc>
             </a:pPr>
             <a:r>
-              <a:rPr sz="1650" b="0">
+              <a:rPr sz="4200" b="1">
                 <a:solidFill>
                   <a:srgbClr val="7DD3FC"/>
                 </a:solidFill>
                 <a:latin typeface="Noto Sans TC"/>
                 <a:ea typeface="Noto Sans TC"/>
               </a:rPr>
-              <a:t>對映</a:t>
-            </a:r>
-          </a:p>
-        </p:txBody>
-      </p:sp>
-      <p:sp>
-        <p:nvSpPr>
-          <p:cNvPr id="13" name="TextBox 12"/>
-          <p:cNvSpPr txBox="1"/>
-          <p:nvPr/>
-        </p:nvSpPr>
-        <p:spPr>
-          <a:xfrm>
-            <a:off x="4810125" y="3893939"/>
-            <a:ext cx="2628900" cy="373260"/>
-          </a:xfrm>
-          <a:prstGeom prst="rect">
-            <a:avLst/>
-          </a:prstGeom>
-          <a:noFill/>
-        </p:spPr>
-        <p:txBody>
-          <a:bodyPr wrap="square" lIns="0" rIns="0" tIns="0" bIns="0" anchor="t">
-            <a:spAutoFit/>
-          </a:bodyPr>
-          <a:lstStyle/>
-          <a:p>
-            <a:pPr algn="l">
-              <a:lnSpc>
-                <a:spcPts val="2640"/>
-              </a:lnSpc>
-            </a:pPr>
-            <a:r>
-              <a:rPr sz="1650" b="0">
-                <a:solidFill>
-                  <a:srgbClr val="E5E7EB"/>
-                </a:solidFill>
-                <a:latin typeface="Noto Sans TC"/>
-                <a:ea typeface="Noto Sans TC"/>
-              </a:rPr>
-              <a:t>選要同步的欄位。</a:t>
-            </a:r>
-          </a:p>
-        </p:txBody>
-      </p:sp>
-      <p:sp>
-        <p:nvSpPr>
-          <p:cNvPr id="14" name="TextBox 13"/>
-          <p:cNvSpPr txBox="1"/>
-          <p:nvPr/>
-        </p:nvSpPr>
-        <p:spPr>
-          <a:xfrm>
-            <a:off x="8391525" y="3017639"/>
-            <a:ext cx="2628900" cy="419100"/>
-          </a:xfrm>
-          <a:prstGeom prst="rect">
-            <a:avLst/>
-          </a:prstGeom>
-          <a:noFill/>
-        </p:spPr>
-        <p:txBody>
-          <a:bodyPr wrap="square" lIns="0" rIns="0" tIns="0" bIns="0" anchor="t">
-            <a:spAutoFit/>
-          </a:bodyPr>
-          <a:lstStyle/>
-          <a:p>
-            <a:pPr algn="l">
-              <a:lnSpc>
-                <a:spcPts val="3000"/>
-              </a:lnSpc>
-            </a:pPr>
-            <a:r>
-              <a:rPr sz="3000" b="1">
-                <a:solidFill>
-                  <a:srgbClr val="F59E0B"/>
-                </a:solidFill>
-                <a:latin typeface="Noto Sans TC"/>
-                <a:ea typeface="Noto Sans TC"/>
-              </a:rPr>
-              <a:t>03</a:t>
-            </a:r>
-          </a:p>
-        </p:txBody>
-      </p:sp>
-      <p:sp>
-        <p:nvSpPr>
-          <p:cNvPr id="15" name="TextBox 14"/>
-          <p:cNvSpPr txBox="1"/>
-          <p:nvPr/>
-        </p:nvSpPr>
-        <p:spPr>
-          <a:xfrm>
-            <a:off x="8391525" y="3531989"/>
-            <a:ext cx="2628900" cy="342900"/>
-          </a:xfrm>
-          <a:prstGeom prst="rect">
-            <a:avLst/>
-          </a:prstGeom>
-          <a:noFill/>
-        </p:spPr>
-        <p:txBody>
-          <a:bodyPr wrap="square" lIns="0" rIns="0" tIns="0" bIns="0" anchor="t">
-            <a:spAutoFit/>
-          </a:bodyPr>
-          <a:lstStyle/>
-          <a:p>
-            <a:pPr algn="l">
-              <a:lnSpc>
-                <a:spcPts val="2400"/>
-              </a:lnSpc>
-            </a:pPr>
-            <a:r>
-              <a:rPr sz="1650" b="0">
-                <a:solidFill>
-                  <a:srgbClr val="7DD3FC"/>
-                </a:solidFill>
-                <a:latin typeface="Noto Sans TC"/>
-                <a:ea typeface="Noto Sans TC"/>
-              </a:rPr>
-              <a:t>上線</a:t>
-            </a:r>
-          </a:p>
-        </p:txBody>
-      </p:sp>
-      <p:sp>
-        <p:nvSpPr>
-          <p:cNvPr id="16" name="TextBox 15"/>
-          <p:cNvSpPr txBox="1"/>
-          <p:nvPr/>
-        </p:nvSpPr>
-        <p:spPr>
-          <a:xfrm>
-            <a:off x="8391525" y="3893939"/>
-            <a:ext cx="2628900" cy="708421"/>
-          </a:xfrm>
-          <a:prstGeom prst="rect">
-            <a:avLst/>
-          </a:prstGeom>
-          <a:noFill/>
-        </p:spPr>
-        <p:txBody>
-          <a:bodyPr wrap="square" lIns="0" rIns="0" tIns="0" bIns="0" anchor="t">
-            <a:spAutoFit/>
-          </a:bodyPr>
-          <a:lstStyle/>
-          <a:p>
-            <a:pPr algn="l">
-              <a:lnSpc>
-                <a:spcPts val="2640"/>
-              </a:lnSpc>
-            </a:pPr>
-            <a:r>
-              <a:rPr sz="1650" b="0">
-                <a:solidFill>
-                  <a:srgbClr val="E5E7EB"/>
-                </a:solidFill>
-                <a:latin typeface="Noto Sans TC"/>
-                <a:ea typeface="Noto Sans TC"/>
-              </a:rPr>
-              <a:t>灰度 10% 開始，一週全量。</a:t>
-            </a:r>
-          </a:p>
-        </p:txBody>
-      </p:sp>
-      <p:sp>
-        <p:nvSpPr>
-          <p:cNvPr id="17" name="TextBox 16"/>
+              <a:t>導入</a:t>
+            </a:r>
+          </a:p>
+        </p:txBody>
+      </p:sp>
+      <p:sp>
+        <p:nvSpPr>
+          <p:cNvPr id="6" name="TextBox 5"/>
           <p:cNvSpPr txBox="1"/>
           <p:nvPr/>
         </p:nvSpPr>
@@ -7915,7 +7854,157 @@
       </p:pic>
       <p:sp>
         <p:nvSpPr>
-          <p:cNvPr id="3" name="TextBox 2"/>
+          <p:cNvPr id="3" name="Rounded Rectangle 2"/>
+          <p:cNvSpPr/>
+          <p:nvPr/>
+        </p:nvSpPr>
+        <p:spPr>
+          <a:xfrm>
+            <a:off x="914400" y="2741414"/>
+            <a:ext cx="3200400" cy="2099071"/>
+          </a:xfrm>
+          <a:prstGeom prst="roundRect">
+            <a:avLst>
+              <a:gd name="adj" fmla="val 9075"/>
+            </a:avLst>
+          </a:prstGeom>
+          <a:solidFill>
+            <a:srgbClr val="E5E7EB">
+              <a:alpha val="6000"/>
+            </a:srgbClr>
+          </a:solidFill>
+          <a:ln w="9525">
+            <a:solidFill>
+              <a:srgbClr val="E5E7EB">
+                <a:alpha val="16000"/>
+              </a:srgbClr>
+            </a:solidFill>
+          </a:ln>
+          <a:effectLst/>
+        </p:spPr>
+        <p:style>
+          <a:lnRef idx="1">
+            <a:schemeClr val="accent1"/>
+          </a:lnRef>
+          <a:fillRef idx="3">
+            <a:schemeClr val="accent1"/>
+          </a:fillRef>
+          <a:effectRef idx="2">
+            <a:schemeClr val="accent1"/>
+          </a:effectRef>
+          <a:fontRef idx="minor">
+            <a:schemeClr val="lt1"/>
+          </a:fontRef>
+        </p:style>
+        <p:txBody>
+          <a:bodyPr rtlCol="0" anchor="ctr"/>
+          <a:lstStyle/>
+          <a:p/>
+        </p:txBody>
+      </p:sp>
+      <p:sp>
+        <p:nvSpPr>
+          <p:cNvPr id="4" name="Rounded Rectangle 3"/>
+          <p:cNvSpPr/>
+          <p:nvPr/>
+        </p:nvSpPr>
+        <p:spPr>
+          <a:xfrm>
+            <a:off x="4495800" y="2741414"/>
+            <a:ext cx="3200400" cy="2099071"/>
+          </a:xfrm>
+          <a:prstGeom prst="roundRect">
+            <a:avLst>
+              <a:gd name="adj" fmla="val 9075"/>
+            </a:avLst>
+          </a:prstGeom>
+          <a:solidFill>
+            <a:srgbClr val="E5E7EB">
+              <a:alpha val="6000"/>
+            </a:srgbClr>
+          </a:solidFill>
+          <a:ln w="9525">
+            <a:solidFill>
+              <a:srgbClr val="E5E7EB">
+                <a:alpha val="16000"/>
+              </a:srgbClr>
+            </a:solidFill>
+          </a:ln>
+          <a:effectLst/>
+        </p:spPr>
+        <p:style>
+          <a:lnRef idx="1">
+            <a:schemeClr val="accent1"/>
+          </a:lnRef>
+          <a:fillRef idx="3">
+            <a:schemeClr val="accent1"/>
+          </a:fillRef>
+          <a:effectRef idx="2">
+            <a:schemeClr val="accent1"/>
+          </a:effectRef>
+          <a:fontRef idx="minor">
+            <a:schemeClr val="lt1"/>
+          </a:fontRef>
+        </p:style>
+        <p:txBody>
+          <a:bodyPr rtlCol="0" anchor="ctr"/>
+          <a:lstStyle/>
+          <a:p/>
+        </p:txBody>
+      </p:sp>
+      <p:sp>
+        <p:nvSpPr>
+          <p:cNvPr id="5" name="Rounded Rectangle 4"/>
+          <p:cNvSpPr/>
+          <p:nvPr/>
+        </p:nvSpPr>
+        <p:spPr>
+          <a:xfrm>
+            <a:off x="8077200" y="2741414"/>
+            <a:ext cx="3200400" cy="2099071"/>
+          </a:xfrm>
+          <a:prstGeom prst="roundRect">
+            <a:avLst>
+              <a:gd name="adj" fmla="val 9075"/>
+            </a:avLst>
+          </a:prstGeom>
+          <a:solidFill>
+            <a:srgbClr val="E5E7EB">
+              <a:alpha val="6000"/>
+            </a:srgbClr>
+          </a:solidFill>
+          <a:ln w="9525">
+            <a:solidFill>
+              <a:srgbClr val="E5E7EB">
+                <a:alpha val="16000"/>
+              </a:srgbClr>
+            </a:solidFill>
+          </a:ln>
+          <a:effectLst/>
+        </p:spPr>
+        <p:style>
+          <a:lnRef idx="1">
+            <a:schemeClr val="accent1"/>
+          </a:lnRef>
+          <a:fillRef idx="3">
+            <a:schemeClr val="accent1"/>
+          </a:fillRef>
+          <a:effectRef idx="2">
+            <a:schemeClr val="accent1"/>
+          </a:effectRef>
+          <a:fontRef idx="minor">
+            <a:schemeClr val="lt1"/>
+          </a:fontRef>
+        </p:style>
+        <p:txBody>
+          <a:bodyPr rtlCol="0" anchor="ctr"/>
+          <a:lstStyle/>
+          <a:p/>
+        </p:txBody>
+      </p:sp>
+      <p:sp>
+        <p:nvSpPr>
+          <p:cNvPr id="6" name="TextBox 5"/>
           <p:cNvSpPr txBox="1"/>
           <p:nvPr/>
         </p:nvSpPr>
@@ -7955,13 +8044,13 @@
       </p:sp>
       <p:sp>
         <p:nvSpPr>
-          <p:cNvPr id="4" name="TextBox 3"/>
+          <p:cNvPr id="7" name="TextBox 6"/>
           <p:cNvSpPr txBox="1"/>
           <p:nvPr/>
         </p:nvSpPr>
         <p:spPr>
           <a:xfrm>
-            <a:off x="914400" y="2861369"/>
+            <a:off x="914400" y="914400"/>
             <a:ext cx="10420350" cy="533400"/>
           </a:xfrm>
           <a:prstGeom prst="rect">
@@ -7988,21 +8077,101 @@
                 <a:latin typeface="Noto Sans TC"/>
                 <a:ea typeface="Noto Sans TC"/>
               </a:rPr>
-              <a:t>不用等，就是最好的功能。</a:t>
-            </a:r>
-          </a:p>
-        </p:txBody>
-      </p:sp>
-      <p:sp>
-        <p:nvSpPr>
-          <p:cNvPr id="5" name="TextBox 4"/>
+              <a:t>三步開始</a:t>
+            </a:r>
+          </a:p>
+        </p:txBody>
+      </p:sp>
+      <p:sp>
+        <p:nvSpPr>
+          <p:cNvPr id="8" name="TextBox 7"/>
           <p:cNvSpPr txBox="1"/>
           <p:nvPr/>
         </p:nvSpPr>
         <p:spPr>
           <a:xfrm>
-            <a:off x="914400" y="3661469"/>
-            <a:ext cx="10420350" cy="373260"/>
+            <a:off x="1228725" y="3017639"/>
+            <a:ext cx="2628900" cy="419100"/>
+          </a:xfrm>
+          <a:prstGeom prst="rect">
+            <a:avLst/>
+          </a:prstGeom>
+          <a:noFill/>
+        </p:spPr>
+        <p:txBody>
+          <a:bodyPr wrap="square" lIns="0" rIns="0" tIns="0" bIns="0" anchor="t">
+            <a:spAutoFit/>
+          </a:bodyPr>
+          <a:lstStyle/>
+          <a:p>
+            <a:pPr algn="l">
+              <a:lnSpc>
+                <a:spcPts val="3000"/>
+              </a:lnSpc>
+            </a:pPr>
+            <a:r>
+              <a:rPr sz="3000" b="1">
+                <a:solidFill>
+                  <a:srgbClr val="F59E0B"/>
+                </a:solidFill>
+                <a:latin typeface="Noto Sans TC"/>
+                <a:ea typeface="Noto Sans TC"/>
+              </a:rPr>
+              <a:t>01</a:t>
+            </a:r>
+          </a:p>
+        </p:txBody>
+      </p:sp>
+      <p:sp>
+        <p:nvSpPr>
+          <p:cNvPr id="9" name="TextBox 8"/>
+          <p:cNvSpPr txBox="1"/>
+          <p:nvPr/>
+        </p:nvSpPr>
+        <p:spPr>
+          <a:xfrm>
+            <a:off x="1228725" y="3531989"/>
+            <a:ext cx="2628900" cy="342900"/>
+          </a:xfrm>
+          <a:prstGeom prst="rect">
+            <a:avLst/>
+          </a:prstGeom>
+          <a:noFill/>
+        </p:spPr>
+        <p:txBody>
+          <a:bodyPr wrap="square" lIns="0" rIns="0" tIns="0" bIns="0" anchor="t">
+            <a:spAutoFit/>
+          </a:bodyPr>
+          <a:lstStyle/>
+          <a:p>
+            <a:pPr algn="l">
+              <a:lnSpc>
+                <a:spcPts val="2400"/>
+              </a:lnSpc>
+            </a:pPr>
+            <a:r>
+              <a:rPr sz="1650" b="0">
+                <a:solidFill>
+                  <a:srgbClr val="7DD3FC"/>
+                </a:solidFill>
+                <a:latin typeface="Noto Sans TC"/>
+                <a:ea typeface="Noto Sans TC"/>
+              </a:rPr>
+              <a:t>接上</a:t>
+            </a:r>
+          </a:p>
+        </p:txBody>
+      </p:sp>
+      <p:sp>
+        <p:nvSpPr>
+          <p:cNvPr id="10" name="TextBox 9"/>
+          <p:cNvSpPr txBox="1"/>
+          <p:nvPr/>
+        </p:nvSpPr>
+        <p:spPr>
+          <a:xfrm>
+            <a:off x="1228725" y="3893939"/>
+            <a:ext cx="2628900" cy="373260"/>
           </a:xfrm>
           <a:prstGeom prst="rect">
             <a:avLst/>
@@ -8023,19 +8192,259 @@
             <a:r>
               <a:rPr sz="1650" b="0">
                 <a:solidFill>
-                  <a:srgbClr val="7DD3FC"/>
+                  <a:srgbClr val="E5E7EB"/>
                 </a:solidFill>
                 <a:latin typeface="Noto Sans TC"/>
                 <a:ea typeface="Noto Sans TC"/>
               </a:rPr>
-              <a:t>team@novalabs.example（示意，換成你的）</a:t>
-            </a:r>
-          </a:p>
-        </p:txBody>
-      </p:sp>
-      <p:sp>
-        <p:nvSpPr>
-          <p:cNvPr id="6" name="TextBox 5"/>
+              <a:t>API 金鑰，三行程式。</a:t>
+            </a:r>
+          </a:p>
+        </p:txBody>
+      </p:sp>
+      <p:sp>
+        <p:nvSpPr>
+          <p:cNvPr id="11" name="TextBox 10"/>
+          <p:cNvSpPr txBox="1"/>
+          <p:nvPr/>
+        </p:nvSpPr>
+        <p:spPr>
+          <a:xfrm>
+            <a:off x="4810125" y="3017639"/>
+            <a:ext cx="2628900" cy="419100"/>
+          </a:xfrm>
+          <a:prstGeom prst="rect">
+            <a:avLst/>
+          </a:prstGeom>
+          <a:noFill/>
+        </p:spPr>
+        <p:txBody>
+          <a:bodyPr wrap="square" lIns="0" rIns="0" tIns="0" bIns="0" anchor="t">
+            <a:spAutoFit/>
+          </a:bodyPr>
+          <a:lstStyle/>
+          <a:p>
+            <a:pPr algn="l">
+              <a:lnSpc>
+                <a:spcPts val="3000"/>
+              </a:lnSpc>
+            </a:pPr>
+            <a:r>
+              <a:rPr sz="3000" b="1">
+                <a:solidFill>
+                  <a:srgbClr val="F59E0B"/>
+                </a:solidFill>
+                <a:latin typeface="Noto Sans TC"/>
+                <a:ea typeface="Noto Sans TC"/>
+              </a:rPr>
+              <a:t>02</a:t>
+            </a:r>
+          </a:p>
+        </p:txBody>
+      </p:sp>
+      <p:sp>
+        <p:nvSpPr>
+          <p:cNvPr id="12" name="TextBox 11"/>
+          <p:cNvSpPr txBox="1"/>
+          <p:nvPr/>
+        </p:nvSpPr>
+        <p:spPr>
+          <a:xfrm>
+            <a:off x="4810125" y="3531989"/>
+            <a:ext cx="2628900" cy="342900"/>
+          </a:xfrm>
+          <a:prstGeom prst="rect">
+            <a:avLst/>
+          </a:prstGeom>
+          <a:noFill/>
+        </p:spPr>
+        <p:txBody>
+          <a:bodyPr wrap="square" lIns="0" rIns="0" tIns="0" bIns="0" anchor="t">
+            <a:spAutoFit/>
+          </a:bodyPr>
+          <a:lstStyle/>
+          <a:p>
+            <a:pPr algn="l">
+              <a:lnSpc>
+                <a:spcPts val="2400"/>
+              </a:lnSpc>
+            </a:pPr>
+            <a:r>
+              <a:rPr sz="1650" b="0">
+                <a:solidFill>
+                  <a:srgbClr val="7DD3FC"/>
+                </a:solidFill>
+                <a:latin typeface="Noto Sans TC"/>
+                <a:ea typeface="Noto Sans TC"/>
+              </a:rPr>
+              <a:t>對映</a:t>
+            </a:r>
+          </a:p>
+        </p:txBody>
+      </p:sp>
+      <p:sp>
+        <p:nvSpPr>
+          <p:cNvPr id="13" name="TextBox 12"/>
+          <p:cNvSpPr txBox="1"/>
+          <p:nvPr/>
+        </p:nvSpPr>
+        <p:spPr>
+          <a:xfrm>
+            <a:off x="4810125" y="3893939"/>
+            <a:ext cx="2628900" cy="373260"/>
+          </a:xfrm>
+          <a:prstGeom prst="rect">
+            <a:avLst/>
+          </a:prstGeom>
+          <a:noFill/>
+        </p:spPr>
+        <p:txBody>
+          <a:bodyPr wrap="square" lIns="0" rIns="0" tIns="0" bIns="0" anchor="t">
+            <a:spAutoFit/>
+          </a:bodyPr>
+          <a:lstStyle/>
+          <a:p>
+            <a:pPr algn="l">
+              <a:lnSpc>
+                <a:spcPts val="2640"/>
+              </a:lnSpc>
+            </a:pPr>
+            <a:r>
+              <a:rPr sz="1650" b="0">
+                <a:solidFill>
+                  <a:srgbClr val="E5E7EB"/>
+                </a:solidFill>
+                <a:latin typeface="Noto Sans TC"/>
+                <a:ea typeface="Noto Sans TC"/>
+              </a:rPr>
+              <a:t>選要同步的欄位。</a:t>
+            </a:r>
+          </a:p>
+        </p:txBody>
+      </p:sp>
+      <p:sp>
+        <p:nvSpPr>
+          <p:cNvPr id="14" name="TextBox 13"/>
+          <p:cNvSpPr txBox="1"/>
+          <p:nvPr/>
+        </p:nvSpPr>
+        <p:spPr>
+          <a:xfrm>
+            <a:off x="8391525" y="3017639"/>
+            <a:ext cx="2628900" cy="419100"/>
+          </a:xfrm>
+          <a:prstGeom prst="rect">
+            <a:avLst/>
+          </a:prstGeom>
+          <a:noFill/>
+        </p:spPr>
+        <p:txBody>
+          <a:bodyPr wrap="square" lIns="0" rIns="0" tIns="0" bIns="0" anchor="t">
+            <a:spAutoFit/>
+          </a:bodyPr>
+          <a:lstStyle/>
+          <a:p>
+            <a:pPr algn="l">
+              <a:lnSpc>
+                <a:spcPts val="3000"/>
+              </a:lnSpc>
+            </a:pPr>
+            <a:r>
+              <a:rPr sz="3000" b="1">
+                <a:solidFill>
+                  <a:srgbClr val="F59E0B"/>
+                </a:solidFill>
+                <a:latin typeface="Noto Sans TC"/>
+                <a:ea typeface="Noto Sans TC"/>
+              </a:rPr>
+              <a:t>03</a:t>
+            </a:r>
+          </a:p>
+        </p:txBody>
+      </p:sp>
+      <p:sp>
+        <p:nvSpPr>
+          <p:cNvPr id="15" name="TextBox 14"/>
+          <p:cNvSpPr txBox="1"/>
+          <p:nvPr/>
+        </p:nvSpPr>
+        <p:spPr>
+          <a:xfrm>
+            <a:off x="8391525" y="3531989"/>
+            <a:ext cx="2628900" cy="342900"/>
+          </a:xfrm>
+          <a:prstGeom prst="rect">
+            <a:avLst/>
+          </a:prstGeom>
+          <a:noFill/>
+        </p:spPr>
+        <p:txBody>
+          <a:bodyPr wrap="square" lIns="0" rIns="0" tIns="0" bIns="0" anchor="t">
+            <a:spAutoFit/>
+          </a:bodyPr>
+          <a:lstStyle/>
+          <a:p>
+            <a:pPr algn="l">
+              <a:lnSpc>
+                <a:spcPts val="2400"/>
+              </a:lnSpc>
+            </a:pPr>
+            <a:r>
+              <a:rPr sz="1650" b="0">
+                <a:solidFill>
+                  <a:srgbClr val="7DD3FC"/>
+                </a:solidFill>
+                <a:latin typeface="Noto Sans TC"/>
+                <a:ea typeface="Noto Sans TC"/>
+              </a:rPr>
+              <a:t>上線</a:t>
+            </a:r>
+          </a:p>
+        </p:txBody>
+      </p:sp>
+      <p:sp>
+        <p:nvSpPr>
+          <p:cNvPr id="16" name="TextBox 15"/>
+          <p:cNvSpPr txBox="1"/>
+          <p:nvPr/>
+        </p:nvSpPr>
+        <p:spPr>
+          <a:xfrm>
+            <a:off x="8391525" y="3893939"/>
+            <a:ext cx="2628900" cy="708421"/>
+          </a:xfrm>
+          <a:prstGeom prst="rect">
+            <a:avLst/>
+          </a:prstGeom>
+          <a:noFill/>
+        </p:spPr>
+        <p:txBody>
+          <a:bodyPr wrap="square" lIns="0" rIns="0" tIns="0" bIns="0" anchor="t">
+            <a:spAutoFit/>
+          </a:bodyPr>
+          <a:lstStyle/>
+          <a:p>
+            <a:pPr algn="l">
+              <a:lnSpc>
+                <a:spcPts val="2640"/>
+              </a:lnSpc>
+            </a:pPr>
+            <a:r>
+              <a:rPr sz="1650" b="0">
+                <a:solidFill>
+                  <a:srgbClr val="E5E7EB"/>
+                </a:solidFill>
+                <a:latin typeface="Noto Sans TC"/>
+                <a:ea typeface="Noto Sans TC"/>
+              </a:rPr>
+              <a:t>灰度 10% 開始，一週全量。</a:t>
+            </a:r>
+          </a:p>
+        </p:txBody>
+      </p:sp>
+      <p:sp>
+        <p:nvSpPr>
+          <p:cNvPr id="17" name="TextBox 16"/>
           <p:cNvSpPr txBox="1"/>
           <p:nvPr/>
         </p:nvSpPr>
